--- a/docs/blackjackbemutató.pptx
+++ b/docs/blackjackbemutató.pptx
@@ -265,7 +265,7 @@
           <a:p>
             <a:fld id="{88EC9507-3793-44D8-8567-373E27AD4E2F}" type="datetimeFigureOut">
               <a:rPr lang="hu-HU" smtClean="0"/>
-              <a:t>2026. 10. 20.</a:t>
+              <a:t>2026. 10. 21.</a:t>
             </a:fld>
             <a:endParaRPr lang="hu-HU"/>
           </a:p>
@@ -463,7 +463,7 @@
           <a:p>
             <a:fld id="{88EC9507-3793-44D8-8567-373E27AD4E2F}" type="datetimeFigureOut">
               <a:rPr lang="hu-HU" smtClean="0"/>
-              <a:t>2026. 10. 20.</a:t>
+              <a:t>2026. 10. 21.</a:t>
             </a:fld>
             <a:endParaRPr lang="hu-HU"/>
           </a:p>
@@ -671,7 +671,7 @@
           <a:p>
             <a:fld id="{88EC9507-3793-44D8-8567-373E27AD4E2F}" type="datetimeFigureOut">
               <a:rPr lang="hu-HU" smtClean="0"/>
-              <a:t>2026. 10. 20.</a:t>
+              <a:t>2026. 10. 21.</a:t>
             </a:fld>
             <a:endParaRPr lang="hu-HU"/>
           </a:p>
@@ -869,7 +869,7 @@
           <a:p>
             <a:fld id="{88EC9507-3793-44D8-8567-373E27AD4E2F}" type="datetimeFigureOut">
               <a:rPr lang="hu-HU" smtClean="0"/>
-              <a:t>2026. 10. 20.</a:t>
+              <a:t>2026. 10. 21.</a:t>
             </a:fld>
             <a:endParaRPr lang="hu-HU"/>
           </a:p>
@@ -1144,7 +1144,7 @@
           <a:p>
             <a:fld id="{88EC9507-3793-44D8-8567-373E27AD4E2F}" type="datetimeFigureOut">
               <a:rPr lang="hu-HU" smtClean="0"/>
-              <a:t>2026. 10. 20.</a:t>
+              <a:t>2026. 10. 21.</a:t>
             </a:fld>
             <a:endParaRPr lang="hu-HU"/>
           </a:p>
@@ -1409,7 +1409,7 @@
           <a:p>
             <a:fld id="{88EC9507-3793-44D8-8567-373E27AD4E2F}" type="datetimeFigureOut">
               <a:rPr lang="hu-HU" smtClean="0"/>
-              <a:t>2026. 10. 20.</a:t>
+              <a:t>2026. 10. 21.</a:t>
             </a:fld>
             <a:endParaRPr lang="hu-HU"/>
           </a:p>
@@ -1821,7 +1821,7 @@
           <a:p>
             <a:fld id="{88EC9507-3793-44D8-8567-373E27AD4E2F}" type="datetimeFigureOut">
               <a:rPr lang="hu-HU" smtClean="0"/>
-              <a:t>2026. 10. 20.</a:t>
+              <a:t>2026. 10. 21.</a:t>
             </a:fld>
             <a:endParaRPr lang="hu-HU"/>
           </a:p>
@@ -1962,7 +1962,7 @@
           <a:p>
             <a:fld id="{88EC9507-3793-44D8-8567-373E27AD4E2F}" type="datetimeFigureOut">
               <a:rPr lang="hu-HU" smtClean="0"/>
-              <a:t>2026. 10. 20.</a:t>
+              <a:t>2026. 10. 21.</a:t>
             </a:fld>
             <a:endParaRPr lang="hu-HU"/>
           </a:p>
@@ -2075,7 +2075,7 @@
           <a:p>
             <a:fld id="{88EC9507-3793-44D8-8567-373E27AD4E2F}" type="datetimeFigureOut">
               <a:rPr lang="hu-HU" smtClean="0"/>
-              <a:t>2026. 10. 20.</a:t>
+              <a:t>2026. 10. 21.</a:t>
             </a:fld>
             <a:endParaRPr lang="hu-HU"/>
           </a:p>
@@ -2386,7 +2386,7 @@
           <a:p>
             <a:fld id="{88EC9507-3793-44D8-8567-373E27AD4E2F}" type="datetimeFigureOut">
               <a:rPr lang="hu-HU" smtClean="0"/>
-              <a:t>2026. 10. 20.</a:t>
+              <a:t>2026. 10. 21.</a:t>
             </a:fld>
             <a:endParaRPr lang="hu-HU"/>
           </a:p>
@@ -2674,7 +2674,7 @@
           <a:p>
             <a:fld id="{88EC9507-3793-44D8-8567-373E27AD4E2F}" type="datetimeFigureOut">
               <a:rPr lang="hu-HU" smtClean="0"/>
-              <a:t>2026. 10. 20.</a:t>
+              <a:t>2026. 10. 21.</a:t>
             </a:fld>
             <a:endParaRPr lang="hu-HU"/>
           </a:p>
@@ -2915,7 +2915,7 @@
           <a:p>
             <a:fld id="{88EC9507-3793-44D8-8567-373E27AD4E2F}" type="datetimeFigureOut">
               <a:rPr lang="hu-HU" smtClean="0"/>
-              <a:t>2026. 10. 20.</a:t>
+              <a:t>2026. 10. 21.</a:t>
             </a:fld>
             <a:endParaRPr lang="hu-HU"/>
           </a:p>
@@ -4640,6 +4640,18 @@
   <p:clrMapOvr>
     <a:masterClrMapping/>
   </p:clrMapOvr>
+  <mc:AlternateContent xmlns:mc="http://schemas.openxmlformats.org/markup-compatibility/2006">
+    <mc:Choice xmlns:p159="http://schemas.microsoft.com/office/powerpoint/2015/09/main" Requires="p159">
+      <p:transition xmlns:p14="http://schemas.microsoft.com/office/powerpoint/2010/main" spd="slow" p14:dur="2000">
+        <p159:morph option="byObject"/>
+      </p:transition>
+    </mc:Choice>
+    <mc:Fallback>
+      <p:transition spd="slow">
+        <p:fade/>
+      </p:transition>
+    </mc:Fallback>
+  </mc:AlternateContent>
 </p:sld>
 </file>
 
@@ -7114,6 +7126,18 @@
   <p:clrMapOvr>
     <a:masterClrMapping/>
   </p:clrMapOvr>
+  <mc:AlternateContent xmlns:mc="http://schemas.openxmlformats.org/markup-compatibility/2006">
+    <mc:Choice xmlns:p159="http://schemas.microsoft.com/office/powerpoint/2015/09/main" Requires="p159">
+      <p:transition xmlns:p14="http://schemas.microsoft.com/office/powerpoint/2010/main" spd="slow" p14:dur="2000">
+        <p159:morph option="byObject"/>
+      </p:transition>
+    </mc:Choice>
+    <mc:Fallback>
+      <p:transition spd="slow">
+        <p:fade/>
+      </p:transition>
+    </mc:Fallback>
+  </mc:AlternateContent>
 </p:sld>
 </file>
 
@@ -9121,6 +9145,18 @@
   <p:clrMapOvr>
     <a:masterClrMapping/>
   </p:clrMapOvr>
+  <mc:AlternateContent xmlns:mc="http://schemas.openxmlformats.org/markup-compatibility/2006">
+    <mc:Choice xmlns:p159="http://schemas.microsoft.com/office/powerpoint/2015/09/main" Requires="p159">
+      <p:transition xmlns:p14="http://schemas.microsoft.com/office/powerpoint/2010/main" spd="slow" p14:dur="2000">
+        <p159:morph option="byObject"/>
+      </p:transition>
+    </mc:Choice>
+    <mc:Fallback>
+      <p:transition spd="slow">
+        <p:fade/>
+      </p:transition>
+    </mc:Fallback>
+  </mc:AlternateContent>
 </p:sld>
 </file>
 
@@ -11811,6 +11847,18 @@
   <p:clrMapOvr>
     <a:masterClrMapping/>
   </p:clrMapOvr>
+  <mc:AlternateContent xmlns:mc="http://schemas.openxmlformats.org/markup-compatibility/2006">
+    <mc:Choice xmlns:p159="http://schemas.microsoft.com/office/powerpoint/2015/09/main" Requires="p159">
+      <p:transition xmlns:p14="http://schemas.microsoft.com/office/powerpoint/2010/main" spd="slow" p14:dur="2000">
+        <p159:morph option="byObject"/>
+      </p:transition>
+    </mc:Choice>
+    <mc:Fallback>
+      <p:transition spd="slow">
+        <p:fade/>
+      </p:transition>
+    </mc:Fallback>
+  </mc:AlternateContent>
 </p:sld>
 </file>
 
@@ -14913,6 +14961,18 @@
   <p:clrMapOvr>
     <a:masterClrMapping/>
   </p:clrMapOvr>
+  <mc:AlternateContent xmlns:mc="http://schemas.openxmlformats.org/markup-compatibility/2006">
+    <mc:Choice xmlns:p159="http://schemas.microsoft.com/office/powerpoint/2015/09/main" Requires="p159">
+      <p:transition xmlns:p14="http://schemas.microsoft.com/office/powerpoint/2010/main" spd="slow" p14:dur="2000">
+        <p159:morph option="byObject"/>
+      </p:transition>
+    </mc:Choice>
+    <mc:Fallback>
+      <p:transition spd="slow">
+        <p:fade/>
+      </p:transition>
+    </mc:Fallback>
+  </mc:AlternateContent>
 </p:sld>
 </file>
 
@@ -15051,6 +15111,18 @@
   <p:clrMapOvr>
     <a:masterClrMapping/>
   </p:clrMapOvr>
+  <mc:AlternateContent xmlns:mc="http://schemas.openxmlformats.org/markup-compatibility/2006">
+    <mc:Choice xmlns:p159="http://schemas.microsoft.com/office/powerpoint/2015/09/main" Requires="p159">
+      <p:transition xmlns:p14="http://schemas.microsoft.com/office/powerpoint/2010/main" spd="slow" p14:dur="2000">
+        <p159:morph option="byObject"/>
+      </p:transition>
+    </mc:Choice>
+    <mc:Fallback>
+      <p:transition spd="slow">
+        <p:fade/>
+      </p:transition>
+    </mc:Fallback>
+  </mc:AlternateContent>
 </p:sld>
 </file>
 
